--- a/classes/parte-14-grc-riesgo-y-cumplimiento/290-certificaciones-y-desarrollo-de-carrera/clase-290-presentacion.pptx
+++ b/classes/parte-14-grc-riesgo-y-cumplimiento/290-certificaciones-y-desarrollo-de-carrera/clase-290-presentacion.pptx
@@ -4473,7 +4473,7 @@
                   <a:srgbClr val="22282E"/>
                 </a:solidFill>
               </a:rPr>
-              <a:t>•  Autoevaluación: usando las 14 partes del programa, puntúa de 1 a 5 tu nivel en 6 áreas (redes, ofensiva, defensiva/SOC, cloud, appsec, GRC). Identifica tus 2 fortalezas y 2 huecos.</a:t>
+              <a:t>•  Autoevaluación: usando las distintas partes del programa, puntúa de 1 a 5 tu nivel en 6 áreas (redes, ofensiva, defensiva/SOC, cloud, appsec, GRC). Identifica tus 2 fortalezas y 2 huecos.</a:t>
             </a:r>
           </a:p>
           <a:p>
